--- a/presentation_projet_tutoree.pptx
+++ b/presentation_projet_tutoree.pptx
@@ -77,7 +77,7 @@
                 </a:solidFill>
                 <a:latin typeface="Arial"/>
               </a:rPr>
-              <a:t>Click to </a:t>
+              <a:t>Cl</a:t>
             </a:r>
             <a:r>
               <a:rPr b="0" lang="en-US" sz="4400" spc="-1" strike="noStrike">
@@ -86,7 +86,7 @@
                 </a:solidFill>
                 <a:latin typeface="Arial"/>
               </a:rPr>
-              <a:t>move the </a:t>
+              <a:t>ic</a:t>
             </a:r>
             <a:r>
               <a:rPr b="0" lang="en-US" sz="4400" spc="-1" strike="noStrike">
@@ -95,7 +95,79 @@
                 </a:solidFill>
                 <a:latin typeface="Arial"/>
               </a:rPr>
-              <a:t>slide</a:t>
+              <a:t>k </a:t>
+            </a:r>
+            <a:r>
+              <a:rPr b="0" lang="en-US" sz="4400" spc="-1" strike="noStrike">
+                <a:solidFill>
+                  <a:srgbClr val="000000"/>
+                </a:solidFill>
+                <a:latin typeface="Arial"/>
+              </a:rPr>
+              <a:t>to </a:t>
+            </a:r>
+            <a:r>
+              <a:rPr b="0" lang="en-US" sz="4400" spc="-1" strike="noStrike">
+                <a:solidFill>
+                  <a:srgbClr val="000000"/>
+                </a:solidFill>
+                <a:latin typeface="Arial"/>
+              </a:rPr>
+              <a:t>m</a:t>
+            </a:r>
+            <a:r>
+              <a:rPr b="0" lang="en-US" sz="4400" spc="-1" strike="noStrike">
+                <a:solidFill>
+                  <a:srgbClr val="000000"/>
+                </a:solidFill>
+                <a:latin typeface="Arial"/>
+              </a:rPr>
+              <a:t>ov</a:t>
+            </a:r>
+            <a:r>
+              <a:rPr b="0" lang="en-US" sz="4400" spc="-1" strike="noStrike">
+                <a:solidFill>
+                  <a:srgbClr val="000000"/>
+                </a:solidFill>
+                <a:latin typeface="Arial"/>
+              </a:rPr>
+              <a:t>e </a:t>
+            </a:r>
+            <a:r>
+              <a:rPr b="0" lang="en-US" sz="4400" spc="-1" strike="noStrike">
+                <a:solidFill>
+                  <a:srgbClr val="000000"/>
+                </a:solidFill>
+                <a:latin typeface="Arial"/>
+              </a:rPr>
+              <a:t>th</a:t>
+            </a:r>
+            <a:r>
+              <a:rPr b="0" lang="en-US" sz="4400" spc="-1" strike="noStrike">
+                <a:solidFill>
+                  <a:srgbClr val="000000"/>
+                </a:solidFill>
+                <a:latin typeface="Arial"/>
+              </a:rPr>
+              <a:t>e </a:t>
+            </a:r>
+            <a:r>
+              <a:rPr b="0" lang="en-US" sz="4400" spc="-1" strike="noStrike">
+                <a:solidFill>
+                  <a:srgbClr val="000000"/>
+                </a:solidFill>
+                <a:latin typeface="Arial"/>
+              </a:rPr>
+              <a:t>sli</a:t>
+            </a:r>
+            <a:r>
+              <a:rPr b="0" lang="en-US" sz="4400" spc="-1" strike="noStrike">
+                <a:solidFill>
+                  <a:srgbClr val="000000"/>
+                </a:solidFill>
+                <a:latin typeface="Arial"/>
+              </a:rPr>
+              <a:t>de</a:t>
             </a:r>
             <a:endParaRPr b="0" lang="en-US" sz="4400" spc="-1" strike="noStrike">
               <a:solidFill>
@@ -144,7 +216,7 @@
                 </a:solidFill>
                 <a:latin typeface="Arial"/>
               </a:rPr>
-              <a:t>Click </a:t>
+              <a:t>Click to edit the notes </a:t>
             </a:r>
             <a:r>
               <a:rPr b="0" lang="en-US" sz="2000" spc="-1" strike="noStrike">
@@ -153,79 +225,7 @@
                 </a:solidFill>
                 <a:latin typeface="Arial"/>
               </a:rPr>
-              <a:t>to </a:t>
-            </a:r>
-            <a:r>
-              <a:rPr b="0" lang="en-US" sz="2000" spc="-1" strike="noStrike">
-                <a:solidFill>
-                  <a:srgbClr val="000000"/>
-                </a:solidFill>
-                <a:latin typeface="Arial"/>
-              </a:rPr>
-              <a:t>edi</a:t>
-            </a:r>
-            <a:r>
-              <a:rPr b="0" lang="en-US" sz="2000" spc="-1" strike="noStrike">
-                <a:solidFill>
-                  <a:srgbClr val="000000"/>
-                </a:solidFill>
-                <a:latin typeface="Arial"/>
-              </a:rPr>
-              <a:t>t </a:t>
-            </a:r>
-            <a:r>
-              <a:rPr b="0" lang="en-US" sz="2000" spc="-1" strike="noStrike">
-                <a:solidFill>
-                  <a:srgbClr val="000000"/>
-                </a:solidFill>
-                <a:latin typeface="Arial"/>
-              </a:rPr>
-              <a:t>the </a:t>
-            </a:r>
-            <a:r>
-              <a:rPr b="0" lang="en-US" sz="2000" spc="-1" strike="noStrike">
-                <a:solidFill>
-                  <a:srgbClr val="000000"/>
-                </a:solidFill>
-                <a:latin typeface="Arial"/>
-              </a:rPr>
-              <a:t>not</a:t>
-            </a:r>
-            <a:r>
-              <a:rPr b="0" lang="en-US" sz="2000" spc="-1" strike="noStrike">
-                <a:solidFill>
-                  <a:srgbClr val="000000"/>
-                </a:solidFill>
-                <a:latin typeface="Arial"/>
-              </a:rPr>
-              <a:t>es </a:t>
-            </a:r>
-            <a:r>
-              <a:rPr b="0" lang="en-US" sz="2000" spc="-1" strike="noStrike">
-                <a:solidFill>
-                  <a:srgbClr val="000000"/>
-                </a:solidFill>
-                <a:latin typeface="Arial"/>
-              </a:rPr>
-              <a:t>for</a:t>
-            </a:r>
-            <a:r>
-              <a:rPr b="0" lang="en-US" sz="2000" spc="-1" strike="noStrike">
-                <a:solidFill>
-                  <a:srgbClr val="000000"/>
-                </a:solidFill>
-                <a:latin typeface="Arial"/>
-              </a:rPr>
-              <a:t>ma</a:t>
-            </a:r>
-            <a:r>
-              <a:rPr b="0" lang="en-US" sz="2000" spc="-1" strike="noStrike">
-                <a:solidFill>
-                  <a:srgbClr val="000000"/>
-                </a:solidFill>
-                <a:latin typeface="Arial"/>
-              </a:rPr>
-              <a:t>t</a:t>
+              <a:t>format</a:t>
             </a:r>
             <a:endParaRPr b="0" lang="en-US" sz="2000" spc="-1" strike="noStrike">
               <a:solidFill>
@@ -447,7 +447,7 @@
             <a:pPr indent="0" algn="r">
               <a:buNone/>
             </a:pPr>
-            <a:fld id="{C0BC2EA3-5C6B-4ED1-A2FF-D966761A0873}" type="slidenum">
+            <a:fld id="{089CDC8B-D336-4A43-8436-3340C3669684}" type="slidenum">
               <a:rPr b="0" lang="en-US" sz="1400" spc="-1" strike="noStrike">
                 <a:solidFill>
                   <a:srgbClr val="000000"/>
@@ -501,7 +501,7 @@
         <p:spPr>
           <a:xfrm>
             <a:off x="685800" y="1143000"/>
-            <a:ext cx="5484960" cy="3084840"/>
+            <a:ext cx="5484600" cy="3084480"/>
           </a:xfrm>
           <a:prstGeom prst="rect">
             <a:avLst/>
@@ -524,7 +524,7 @@
         <p:spPr>
           <a:xfrm>
             <a:off x="685800" y="4400640"/>
-            <a:ext cx="5484960" cy="3598920"/>
+            <a:ext cx="5484600" cy="3598560"/>
           </a:xfrm>
           <a:prstGeom prst="rect">
             <a:avLst/>
@@ -579,7 +579,7 @@
         <p:spPr>
           <a:xfrm>
             <a:off x="3884760" y="8685360"/>
-            <a:ext cx="2970360" cy="457200"/>
+            <a:ext cx="2970000" cy="456840"/>
           </a:xfrm>
           <a:prstGeom prst="rect">
             <a:avLst/>
@@ -621,7 +621,7 @@
                 <a:tab algn="l" pos="0"/>
               </a:tabLst>
             </a:pPr>
-            <a:fld id="{BB280BC1-81CC-441B-B993-7D35A3CE2DF1}" type="slidenum">
+            <a:fld id="{F42D11E0-A96B-4EB7-93DD-2C85C011BF0D}" type="slidenum">
               <a:rPr b="0" lang="en-US" sz="1200" spc="-1" strike="noStrike">
                 <a:solidFill>
                   <a:schemeClr val="dk1"/>
@@ -675,7 +675,7 @@
         <p:spPr>
           <a:xfrm>
             <a:off x="685800" y="1143000"/>
-            <a:ext cx="5484960" cy="3084840"/>
+            <a:ext cx="5484600" cy="3084480"/>
           </a:xfrm>
           <a:prstGeom prst="rect">
             <a:avLst/>
@@ -698,7 +698,7 @@
         <p:spPr>
           <a:xfrm>
             <a:off x="685800" y="4400640"/>
-            <a:ext cx="5484960" cy="3598920"/>
+            <a:ext cx="5484600" cy="3598560"/>
           </a:xfrm>
           <a:prstGeom prst="rect">
             <a:avLst/>
@@ -738,7 +738,7 @@
         <p:spPr>
           <a:xfrm>
             <a:off x="3884760" y="8685360"/>
-            <a:ext cx="2970360" cy="457200"/>
+            <a:ext cx="2970000" cy="456840"/>
           </a:xfrm>
           <a:prstGeom prst="rect">
             <a:avLst/>
@@ -780,7 +780,7 @@
                 <a:tab algn="l" pos="0"/>
               </a:tabLst>
             </a:pPr>
-            <a:fld id="{272BB707-F845-4779-9D06-D113968998F5}" type="slidenum">
+            <a:fld id="{385E75F4-7B79-4447-B281-27B963C1E744}" type="slidenum">
               <a:rPr b="0" lang="en-US" sz="1200" spc="-1" strike="noStrike">
                 <a:solidFill>
                   <a:schemeClr val="dk1"/>
@@ -834,7 +834,7 @@
         <p:spPr>
           <a:xfrm>
             <a:off x="685800" y="1143000"/>
-            <a:ext cx="5484960" cy="3084840"/>
+            <a:ext cx="5484600" cy="3084480"/>
           </a:xfrm>
           <a:prstGeom prst="rect">
             <a:avLst/>
@@ -857,7 +857,7 @@
         <p:spPr>
           <a:xfrm>
             <a:off x="685800" y="4400640"/>
-            <a:ext cx="5484960" cy="3598920"/>
+            <a:ext cx="5484600" cy="3598560"/>
           </a:xfrm>
           <a:prstGeom prst="rect">
             <a:avLst/>
@@ -912,7 +912,7 @@
         <p:spPr>
           <a:xfrm>
             <a:off x="3884760" y="8685360"/>
-            <a:ext cx="2970360" cy="457200"/>
+            <a:ext cx="2970000" cy="456840"/>
           </a:xfrm>
           <a:prstGeom prst="rect">
             <a:avLst/>
@@ -954,7 +954,7 @@
                 <a:tab algn="l" pos="0"/>
               </a:tabLst>
             </a:pPr>
-            <a:fld id="{CD0B52F5-C6DF-41DA-8D7B-2651B1A3504C}" type="slidenum">
+            <a:fld id="{9F619E7C-1E06-47DD-A49C-C636A49FBBE0}" type="slidenum">
               <a:rPr b="0" lang="en-US" sz="1200" spc="-1" strike="noStrike">
                 <a:solidFill>
                   <a:schemeClr val="dk1"/>
@@ -1008,7 +1008,7 @@
         <p:spPr>
           <a:xfrm>
             <a:off x="685800" y="1143000"/>
-            <a:ext cx="5484960" cy="3084840"/>
+            <a:ext cx="5484600" cy="3084480"/>
           </a:xfrm>
           <a:prstGeom prst="rect">
             <a:avLst/>
@@ -1031,7 +1031,7 @@
         <p:spPr>
           <a:xfrm>
             <a:off x="685800" y="4400640"/>
-            <a:ext cx="5484960" cy="3598920"/>
+            <a:ext cx="5484600" cy="3598560"/>
           </a:xfrm>
           <a:prstGeom prst="rect">
             <a:avLst/>
@@ -1071,7 +1071,7 @@
         <p:spPr>
           <a:xfrm>
             <a:off x="3884760" y="8685360"/>
-            <a:ext cx="2970360" cy="457200"/>
+            <a:ext cx="2970000" cy="456840"/>
           </a:xfrm>
           <a:prstGeom prst="rect">
             <a:avLst/>
@@ -1113,7 +1113,7 @@
                 <a:tab algn="l" pos="0"/>
               </a:tabLst>
             </a:pPr>
-            <a:fld id="{D0E57D4D-7868-4F9F-ADB1-026FD84EF6AD}" type="slidenum">
+            <a:fld id="{0C90566E-4877-449D-9C14-A5D701CA11A5}" type="slidenum">
               <a:rPr b="0" lang="en-US" sz="1200" spc="-1" strike="noStrike">
                 <a:solidFill>
                   <a:schemeClr val="dk1"/>
@@ -1167,7 +1167,7 @@
         <p:spPr>
           <a:xfrm>
             <a:off x="685800" y="1143000"/>
-            <a:ext cx="5484960" cy="3084840"/>
+            <a:ext cx="5484600" cy="3084480"/>
           </a:xfrm>
           <a:prstGeom prst="rect">
             <a:avLst/>
@@ -1190,7 +1190,7 @@
         <p:spPr>
           <a:xfrm>
             <a:off x="685800" y="4400640"/>
-            <a:ext cx="5484960" cy="3598920"/>
+            <a:ext cx="5484600" cy="3598560"/>
           </a:xfrm>
           <a:prstGeom prst="rect">
             <a:avLst/>
@@ -1230,7 +1230,7 @@
         <p:spPr>
           <a:xfrm>
             <a:off x="3884760" y="8685360"/>
-            <a:ext cx="2970360" cy="457200"/>
+            <a:ext cx="2970000" cy="456840"/>
           </a:xfrm>
           <a:prstGeom prst="rect">
             <a:avLst/>
@@ -1272,7 +1272,7 @@
                 <a:tab algn="l" pos="0"/>
               </a:tabLst>
             </a:pPr>
-            <a:fld id="{FC2E7CED-2621-4E34-AEA7-4039C7D88634}" type="slidenum">
+            <a:fld id="{3A63D6C1-052C-4E6F-BA8F-F81BD3A03485}" type="slidenum">
               <a:rPr b="0" lang="en-US" sz="1200" spc="-1" strike="noStrike">
                 <a:solidFill>
                   <a:schemeClr val="dk1"/>
@@ -1326,7 +1326,7 @@
         <p:spPr>
           <a:xfrm>
             <a:off x="685800" y="1143000"/>
-            <a:ext cx="5484960" cy="3084840"/>
+            <a:ext cx="5484600" cy="3084480"/>
           </a:xfrm>
           <a:prstGeom prst="rect">
             <a:avLst/>
@@ -1349,7 +1349,7 @@
         <p:spPr>
           <a:xfrm>
             <a:off x="685800" y="4400640"/>
-            <a:ext cx="5484960" cy="3598920"/>
+            <a:ext cx="5484600" cy="3598560"/>
           </a:xfrm>
           <a:prstGeom prst="rect">
             <a:avLst/>
@@ -1389,7 +1389,7 @@
         <p:spPr>
           <a:xfrm>
             <a:off x="3884760" y="8685360"/>
-            <a:ext cx="2970360" cy="457200"/>
+            <a:ext cx="2970000" cy="456840"/>
           </a:xfrm>
           <a:prstGeom prst="rect">
             <a:avLst/>
@@ -1431,7 +1431,7 @@
                 <a:tab algn="l" pos="0"/>
               </a:tabLst>
             </a:pPr>
-            <a:fld id="{5A52661F-C2D8-4CB6-A6B4-8A29E9C730AD}" type="slidenum">
+            <a:fld id="{3C5D438D-CD39-491A-B54A-343B4B4F210A}" type="slidenum">
               <a:rPr b="0" lang="en-US" sz="1200" spc="-1" strike="noStrike">
                 <a:solidFill>
                   <a:schemeClr val="dk1"/>
@@ -1485,7 +1485,7 @@
         <p:spPr>
           <a:xfrm>
             <a:off x="685800" y="1143000"/>
-            <a:ext cx="5484960" cy="3084840"/>
+            <a:ext cx="5484600" cy="3084480"/>
           </a:xfrm>
           <a:prstGeom prst="rect">
             <a:avLst/>
@@ -1508,7 +1508,7 @@
         <p:spPr>
           <a:xfrm>
             <a:off x="685800" y="4400640"/>
-            <a:ext cx="5484960" cy="3598920"/>
+            <a:ext cx="5484600" cy="3598560"/>
           </a:xfrm>
           <a:prstGeom prst="rect">
             <a:avLst/>
@@ -1548,7 +1548,7 @@
         <p:spPr>
           <a:xfrm>
             <a:off x="3884760" y="8685360"/>
-            <a:ext cx="2970360" cy="457200"/>
+            <a:ext cx="2970000" cy="456840"/>
           </a:xfrm>
           <a:prstGeom prst="rect">
             <a:avLst/>
@@ -1590,7 +1590,7 @@
                 <a:tab algn="l" pos="0"/>
               </a:tabLst>
             </a:pPr>
-            <a:fld id="{0057ED97-2B44-4FAF-B32A-1F8B5846EE6A}" type="slidenum">
+            <a:fld id="{67D7ADCD-9DEB-4D3B-A99D-97D6105E217E}" type="slidenum">
               <a:rPr b="0" lang="en-US" sz="1200" spc="-1" strike="noStrike">
                 <a:solidFill>
                   <a:schemeClr val="dk1"/>
@@ -1644,7 +1644,7 @@
         <p:spPr>
           <a:xfrm>
             <a:off x="685800" y="1143000"/>
-            <a:ext cx="5484960" cy="3084840"/>
+            <a:ext cx="5484600" cy="3084480"/>
           </a:xfrm>
           <a:prstGeom prst="rect">
             <a:avLst/>
@@ -1667,7 +1667,7 @@
         <p:spPr>
           <a:xfrm>
             <a:off x="685800" y="4400640"/>
-            <a:ext cx="5484960" cy="3598920"/>
+            <a:ext cx="5484600" cy="3598560"/>
           </a:xfrm>
           <a:prstGeom prst="rect">
             <a:avLst/>
@@ -1707,7 +1707,7 @@
         <p:spPr>
           <a:xfrm>
             <a:off x="3884760" y="8685360"/>
-            <a:ext cx="2970360" cy="457200"/>
+            <a:ext cx="2970000" cy="456840"/>
           </a:xfrm>
           <a:prstGeom prst="rect">
             <a:avLst/>
@@ -1749,7 +1749,7 @@
                 <a:tab algn="l" pos="0"/>
               </a:tabLst>
             </a:pPr>
-            <a:fld id="{092678D1-B974-4EDD-B26D-F13A00709758}" type="slidenum">
+            <a:fld id="{92EB3C3B-9A06-4966-B2F6-C95C948D245C}" type="slidenum">
               <a:rPr b="0" lang="en-US" sz="1200" spc="-1" strike="noStrike">
                 <a:solidFill>
                   <a:schemeClr val="dk1"/>
@@ -1803,7 +1803,7 @@
         <p:spPr>
           <a:xfrm>
             <a:off x="685800" y="1143000"/>
-            <a:ext cx="5484960" cy="3084840"/>
+            <a:ext cx="5484600" cy="3084480"/>
           </a:xfrm>
           <a:prstGeom prst="rect">
             <a:avLst/>
@@ -1826,7 +1826,7 @@
         <p:spPr>
           <a:xfrm>
             <a:off x="685800" y="4400640"/>
-            <a:ext cx="5484960" cy="3598920"/>
+            <a:ext cx="5484600" cy="3598560"/>
           </a:xfrm>
           <a:prstGeom prst="rect">
             <a:avLst/>
@@ -1881,7 +1881,7 @@
         <p:spPr>
           <a:xfrm>
             <a:off x="3884760" y="8685360"/>
-            <a:ext cx="2970360" cy="457200"/>
+            <a:ext cx="2970000" cy="456840"/>
           </a:xfrm>
           <a:prstGeom prst="rect">
             <a:avLst/>
@@ -1923,7 +1923,7 @@
                 <a:tab algn="l" pos="0"/>
               </a:tabLst>
             </a:pPr>
-            <a:fld id="{415ADE30-0D14-4EAC-88AB-7AE5DEBCAEAE}" type="slidenum">
+            <a:fld id="{ED20D096-708C-4A5D-981E-A71132802267}" type="slidenum">
               <a:rPr b="0" lang="en-US" sz="1200" spc="-1" strike="noStrike">
                 <a:solidFill>
                   <a:schemeClr val="dk1"/>
@@ -2449,16 +2449,7 @@
                 </a:solidFill>
                 <a:latin typeface="Arial"/>
               </a:rPr>
-              <a:t>Click to edit the title </a:t>
-            </a:r>
-            <a:r>
-              <a:rPr b="0" lang="en-US" sz="1800" spc="-1" strike="noStrike">
-                <a:solidFill>
-                  <a:srgbClr val="000000"/>
-                </a:solidFill>
-                <a:latin typeface="Arial"/>
-              </a:rPr>
-              <a:t>text format</a:t>
+              <a:t>Click to edit the title text format</a:t>
             </a:r>
             <a:endParaRPr b="0" lang="en-US" sz="1800" spc="-1" strike="noStrike">
               <a:solidFill>
@@ -2736,7 +2727,7 @@
         <p:spPr>
           <a:xfrm>
             <a:off x="0" y="0"/>
-            <a:ext cx="163080" cy="5142240"/>
+            <a:ext cx="162720" cy="5141880"/>
           </a:xfrm>
           <a:prstGeom prst="rect">
             <a:avLst/>
@@ -2786,7 +2777,7 @@
         <p:spPr>
           <a:xfrm>
             <a:off x="5943600" y="-1097280"/>
-            <a:ext cx="5027760" cy="5027760"/>
+            <a:ext cx="5027400" cy="5027400"/>
           </a:xfrm>
           <a:prstGeom prst="ellipse">
             <a:avLst/>
@@ -2840,7 +2831,7 @@
         <p:spPr>
           <a:xfrm>
             <a:off x="6583680" y="-457200"/>
-            <a:ext cx="3839040" cy="3839040"/>
+            <a:ext cx="3838680" cy="3838680"/>
           </a:xfrm>
           <a:prstGeom prst="ellipse">
             <a:avLst/>
@@ -2894,7 +2885,7 @@
         <p:spPr>
           <a:xfrm>
             <a:off x="502920" y="914400"/>
-            <a:ext cx="2010240" cy="291240"/>
+            <a:ext cx="2009880" cy="290880"/>
           </a:xfrm>
           <a:prstGeom prst="rect">
             <a:avLst/>
@@ -2944,7 +2935,7 @@
         <p:spPr>
           <a:xfrm>
             <a:off x="502920" y="914400"/>
-            <a:ext cx="2010240" cy="291240"/>
+            <a:ext cx="2009880" cy="290880"/>
           </a:xfrm>
           <a:prstGeom prst="rect">
             <a:avLst/>
@@ -3000,8 +2991,8 @@
         </p:nvSpPr>
         <p:spPr>
           <a:xfrm>
-            <a:off x="457200" y="1417320"/>
-            <a:ext cx="7770960" cy="1644480"/>
+            <a:off x="493200" y="1453320"/>
+            <a:ext cx="7770600" cy="1644120"/>
           </a:xfrm>
           <a:prstGeom prst="rect">
             <a:avLst/>
@@ -3084,7 +3075,7 @@
         <p:spPr>
           <a:xfrm>
             <a:off x="502920" y="3154680"/>
-            <a:ext cx="6856560" cy="730080"/>
+            <a:ext cx="6856200" cy="729720"/>
           </a:xfrm>
           <a:prstGeom prst="rect">
             <a:avLst/>
@@ -3167,7 +3158,7 @@
         <p:spPr>
           <a:xfrm>
             <a:off x="0" y="4526280"/>
-            <a:ext cx="9142560" cy="615960"/>
+            <a:ext cx="9142200" cy="615600"/>
           </a:xfrm>
           <a:prstGeom prst="rect">
             <a:avLst/>
@@ -3217,7 +3208,7 @@
         <p:spPr>
           <a:xfrm>
             <a:off x="457200" y="4526280"/>
-            <a:ext cx="8228160" cy="615960"/>
+            <a:ext cx="8227800" cy="615600"/>
           </a:xfrm>
           <a:prstGeom prst="rect">
             <a:avLst/>
@@ -3284,7 +3275,7 @@
         <p:spPr>
           <a:xfrm>
             <a:off x="6172200" y="2514600"/>
-            <a:ext cx="2513520" cy="227520"/>
+            <a:ext cx="2513160" cy="227160"/>
           </a:xfrm>
           <a:prstGeom prst="rect">
             <a:avLst/>
@@ -3346,7 +3337,7 @@
         <p:spPr>
           <a:xfrm>
             <a:off x="6858000" y="1295640"/>
-            <a:ext cx="989280" cy="989280"/>
+            <a:ext cx="988920" cy="988920"/>
           </a:xfrm>
           <a:prstGeom prst="rect">
             <a:avLst/>
@@ -3402,7 +3393,7 @@
         <p:spPr>
           <a:xfrm>
             <a:off x="0" y="0"/>
-            <a:ext cx="9142560" cy="775800"/>
+            <a:ext cx="9142200" cy="775440"/>
           </a:xfrm>
           <a:prstGeom prst="rect">
             <a:avLst/>
@@ -3452,7 +3443,7 @@
         <p:spPr>
           <a:xfrm>
             <a:off x="365760" y="0"/>
-            <a:ext cx="8228160" cy="775800"/>
+            <a:ext cx="8227800" cy="775440"/>
           </a:xfrm>
           <a:prstGeom prst="rect">
             <a:avLst/>
@@ -3509,7 +3500,7 @@
         <p:spPr>
           <a:xfrm>
             <a:off x="365760" y="1005840"/>
-            <a:ext cx="4113360" cy="912960"/>
+            <a:ext cx="4113000" cy="912600"/>
           </a:xfrm>
           <a:prstGeom prst="rect">
             <a:avLst/>
@@ -3566,7 +3557,7 @@
         <p:spPr>
           <a:xfrm>
             <a:off x="365760" y="1005840"/>
-            <a:ext cx="62640" cy="912960"/>
+            <a:ext cx="62280" cy="912600"/>
           </a:xfrm>
           <a:prstGeom prst="rect">
             <a:avLst/>
@@ -3616,7 +3607,7 @@
         <p:spPr>
           <a:xfrm>
             <a:off x="475560" y="1005840"/>
-            <a:ext cx="638640" cy="912960"/>
+            <a:ext cx="638280" cy="912600"/>
           </a:xfrm>
           <a:prstGeom prst="rect">
             <a:avLst/>
@@ -3673,7 +3664,7 @@
         <p:spPr>
           <a:xfrm>
             <a:off x="1143000" y="1005840"/>
-            <a:ext cx="3198960" cy="912960"/>
+            <a:ext cx="3198600" cy="912600"/>
           </a:xfrm>
           <a:prstGeom prst="rect">
             <a:avLst/>
@@ -3730,7 +3721,7 @@
         <p:spPr>
           <a:xfrm>
             <a:off x="365760" y="2194560"/>
-            <a:ext cx="4113360" cy="912960"/>
+            <a:ext cx="4113000" cy="912600"/>
           </a:xfrm>
           <a:prstGeom prst="rect">
             <a:avLst/>
@@ -3787,7 +3778,7 @@
         <p:spPr>
           <a:xfrm>
             <a:off x="365760" y="2194560"/>
-            <a:ext cx="62640" cy="912960"/>
+            <a:ext cx="62280" cy="912600"/>
           </a:xfrm>
           <a:prstGeom prst="rect">
             <a:avLst/>
@@ -3837,7 +3828,7 @@
         <p:spPr>
           <a:xfrm>
             <a:off x="475560" y="2194560"/>
-            <a:ext cx="638640" cy="912960"/>
+            <a:ext cx="638280" cy="912600"/>
           </a:xfrm>
           <a:prstGeom prst="rect">
             <a:avLst/>
@@ -3894,7 +3885,7 @@
         <p:spPr>
           <a:xfrm>
             <a:off x="1179000" y="2194560"/>
-            <a:ext cx="3198960" cy="912960"/>
+            <a:ext cx="3198600" cy="912600"/>
           </a:xfrm>
           <a:prstGeom prst="rect">
             <a:avLst/>
@@ -3951,7 +3942,7 @@
         <p:spPr>
           <a:xfrm>
             <a:off x="365760" y="3383280"/>
-            <a:ext cx="4113360" cy="912960"/>
+            <a:ext cx="4113000" cy="912600"/>
           </a:xfrm>
           <a:prstGeom prst="rect">
             <a:avLst/>
@@ -4008,7 +3999,7 @@
         <p:spPr>
           <a:xfrm>
             <a:off x="365760" y="3383280"/>
-            <a:ext cx="62640" cy="912960"/>
+            <a:ext cx="62280" cy="912600"/>
           </a:xfrm>
           <a:prstGeom prst="rect">
             <a:avLst/>
@@ -4058,7 +4049,7 @@
         <p:spPr>
           <a:xfrm>
             <a:off x="475560" y="3383280"/>
-            <a:ext cx="638640" cy="912960"/>
+            <a:ext cx="638280" cy="912600"/>
           </a:xfrm>
           <a:prstGeom prst="rect">
             <a:avLst/>
@@ -4115,7 +4106,7 @@
         <p:spPr>
           <a:xfrm>
             <a:off x="1143000" y="3383280"/>
-            <a:ext cx="3198960" cy="912960"/>
+            <a:ext cx="3198600" cy="912600"/>
           </a:xfrm>
           <a:prstGeom prst="rect">
             <a:avLst/>
@@ -4172,7 +4163,7 @@
         <p:spPr>
           <a:xfrm>
             <a:off x="4846320" y="1005840"/>
-            <a:ext cx="4113360" cy="912960"/>
+            <a:ext cx="4113000" cy="912600"/>
           </a:xfrm>
           <a:prstGeom prst="rect">
             <a:avLst/>
@@ -4229,7 +4220,7 @@
         <p:spPr>
           <a:xfrm>
             <a:off x="4846320" y="1005840"/>
-            <a:ext cx="62640" cy="912960"/>
+            <a:ext cx="62280" cy="912600"/>
           </a:xfrm>
           <a:prstGeom prst="rect">
             <a:avLst/>
@@ -4279,7 +4270,7 @@
         <p:spPr>
           <a:xfrm>
             <a:off x="4956120" y="1005840"/>
-            <a:ext cx="638640" cy="912960"/>
+            <a:ext cx="638280" cy="912600"/>
           </a:xfrm>
           <a:prstGeom prst="rect">
             <a:avLst/>
@@ -4336,7 +4327,7 @@
         <p:spPr>
           <a:xfrm>
             <a:off x="5623560" y="1005840"/>
-            <a:ext cx="3198960" cy="912960"/>
+            <a:ext cx="3198600" cy="912600"/>
           </a:xfrm>
           <a:prstGeom prst="rect">
             <a:avLst/>
@@ -4393,7 +4384,7 @@
         <p:spPr>
           <a:xfrm>
             <a:off x="4846320" y="2194560"/>
-            <a:ext cx="62640" cy="912960"/>
+            <a:ext cx="62280" cy="912600"/>
           </a:xfrm>
           <a:prstGeom prst="rect">
             <a:avLst/>
@@ -4443,7 +4434,7 @@
         <p:spPr>
           <a:xfrm>
             <a:off x="4956120" y="2194560"/>
-            <a:ext cx="638640" cy="912960"/>
+            <a:ext cx="638280" cy="912600"/>
           </a:xfrm>
           <a:prstGeom prst="rect">
             <a:avLst/>
@@ -4500,7 +4491,7 @@
         <p:spPr>
           <a:xfrm>
             <a:off x="5623560" y="2194560"/>
-            <a:ext cx="3198960" cy="912960"/>
+            <a:ext cx="3198600" cy="912600"/>
           </a:xfrm>
           <a:prstGeom prst="rect">
             <a:avLst/>
@@ -4557,7 +4548,7 @@
         <p:spPr>
           <a:xfrm>
             <a:off x="4846320" y="3383280"/>
-            <a:ext cx="4113360" cy="912960"/>
+            <a:ext cx="4113000" cy="912600"/>
           </a:xfrm>
           <a:prstGeom prst="rect">
             <a:avLst/>
@@ -4614,7 +4605,7 @@
         <p:spPr>
           <a:xfrm>
             <a:off x="4846320" y="3383280"/>
-            <a:ext cx="62640" cy="912960"/>
+            <a:ext cx="62280" cy="912600"/>
           </a:xfrm>
           <a:prstGeom prst="rect">
             <a:avLst/>
@@ -4664,7 +4655,7 @@
         <p:spPr>
           <a:xfrm>
             <a:off x="4956120" y="3383280"/>
-            <a:ext cx="638640" cy="912960"/>
+            <a:ext cx="638280" cy="912600"/>
           </a:xfrm>
           <a:prstGeom prst="rect">
             <a:avLst/>
@@ -4721,7 +4712,7 @@
         <p:spPr>
           <a:xfrm>
             <a:off x="5623560" y="3383280"/>
-            <a:ext cx="3198960" cy="912960"/>
+            <a:ext cx="3198600" cy="912600"/>
           </a:xfrm>
           <a:prstGeom prst="rect">
             <a:avLst/>
@@ -4815,7 +4806,7 @@
         <p:spPr>
           <a:xfrm>
             <a:off x="0" y="0"/>
-            <a:ext cx="9142560" cy="775800"/>
+            <a:ext cx="9142200" cy="775440"/>
           </a:xfrm>
           <a:prstGeom prst="rect">
             <a:avLst/>
@@ -4865,7 +4856,7 @@
         <p:spPr>
           <a:xfrm>
             <a:off x="365760" y="0"/>
-            <a:ext cx="8228160" cy="775800"/>
+            <a:ext cx="8227800" cy="775440"/>
           </a:xfrm>
           <a:prstGeom prst="rect">
             <a:avLst/>
@@ -4922,7 +4913,7 @@
         <p:spPr>
           <a:xfrm>
             <a:off x="274320" y="914400"/>
-            <a:ext cx="4113360" cy="410040"/>
+            <a:ext cx="4113000" cy="409680"/>
           </a:xfrm>
           <a:prstGeom prst="rect">
             <a:avLst/>
@@ -4979,7 +4970,7 @@
         <p:spPr>
           <a:xfrm>
             <a:off x="483480" y="1417320"/>
-            <a:ext cx="3839040" cy="3016080"/>
+            <a:ext cx="3838680" cy="3015720"/>
           </a:xfrm>
           <a:prstGeom prst="rect">
             <a:avLst/>
@@ -5111,7 +5102,7 @@
         <p:spPr>
           <a:xfrm>
             <a:off x="2286000" y="2286000"/>
-            <a:ext cx="4113720" cy="913320"/>
+            <a:ext cx="4113360" cy="912960"/>
           </a:xfrm>
           <a:prstGeom prst="rect">
             <a:avLst/>
@@ -5169,7 +5160,7 @@
         <p:spPr>
           <a:xfrm>
             <a:off x="2286000" y="3429000"/>
-            <a:ext cx="4113720" cy="913320"/>
+            <a:ext cx="4113360" cy="912960"/>
           </a:xfrm>
           <a:prstGeom prst="rect">
             <a:avLst/>
@@ -5264,7 +5255,7 @@
         <p:spPr>
           <a:xfrm>
             <a:off x="0" y="0"/>
-            <a:ext cx="9142560" cy="775800"/>
+            <a:ext cx="9142200" cy="775440"/>
           </a:xfrm>
           <a:prstGeom prst="rect">
             <a:avLst/>
@@ -5314,7 +5305,7 @@
         <p:spPr>
           <a:xfrm>
             <a:off x="365760" y="0"/>
-            <a:ext cx="8228160" cy="775800"/>
+            <a:ext cx="8227800" cy="775440"/>
           </a:xfrm>
           <a:prstGeom prst="rect">
             <a:avLst/>
@@ -5371,7 +5362,7 @@
         <p:spPr>
           <a:xfrm>
             <a:off x="274320" y="960120"/>
-            <a:ext cx="4159080" cy="1735920"/>
+            <a:ext cx="4158720" cy="1735560"/>
           </a:xfrm>
           <a:prstGeom prst="rect">
             <a:avLst/>
@@ -5428,7 +5419,7 @@
         <p:spPr>
           <a:xfrm>
             <a:off x="274320" y="960120"/>
-            <a:ext cx="4159080" cy="62640"/>
+            <a:ext cx="4158720" cy="62280"/>
           </a:xfrm>
           <a:prstGeom prst="rect">
             <a:avLst/>
@@ -5478,7 +5469,7 @@
         <p:spPr>
           <a:xfrm>
             <a:off x="457200" y="1188720"/>
-            <a:ext cx="592920" cy="592920"/>
+            <a:ext cx="592560" cy="592560"/>
           </a:xfrm>
           <a:prstGeom prst="ellipse">
             <a:avLst/>
@@ -5532,7 +5523,7 @@
         <p:spPr>
           <a:xfrm>
             <a:off x="457200" y="1188720"/>
-            <a:ext cx="592920" cy="592920"/>
+            <a:ext cx="592560" cy="592560"/>
           </a:xfrm>
           <a:prstGeom prst="rect">
             <a:avLst/>
@@ -5589,7 +5580,7 @@
         <p:spPr>
           <a:xfrm>
             <a:off x="1170360" y="1097280"/>
-            <a:ext cx="3107520" cy="272880"/>
+            <a:ext cx="3107160" cy="272520"/>
           </a:xfrm>
           <a:prstGeom prst="rect">
             <a:avLst/>
@@ -5646,7 +5637,7 @@
         <p:spPr>
           <a:xfrm>
             <a:off x="1170360" y="1371600"/>
-            <a:ext cx="3107520" cy="364320"/>
+            <a:ext cx="3107160" cy="363960"/>
           </a:xfrm>
           <a:prstGeom prst="rect">
             <a:avLst/>
@@ -5703,7 +5694,7 @@
         <p:spPr>
           <a:xfrm>
             <a:off x="457200" y="1965960"/>
-            <a:ext cx="3747600" cy="638640"/>
+            <a:ext cx="3747240" cy="638280"/>
           </a:xfrm>
           <a:prstGeom prst="rect">
             <a:avLst/>
@@ -5760,7 +5751,7 @@
         <p:spPr>
           <a:xfrm>
             <a:off x="4754880" y="960120"/>
-            <a:ext cx="4159080" cy="1735920"/>
+            <a:ext cx="4158720" cy="1735560"/>
           </a:xfrm>
           <a:prstGeom prst="rect">
             <a:avLst/>
@@ -5817,7 +5808,7 @@
         <p:spPr>
           <a:xfrm>
             <a:off x="4754880" y="960120"/>
-            <a:ext cx="4159080" cy="62640"/>
+            <a:ext cx="4158720" cy="62280"/>
           </a:xfrm>
           <a:prstGeom prst="rect">
             <a:avLst/>
@@ -5867,7 +5858,7 @@
         <p:spPr>
           <a:xfrm>
             <a:off x="4937760" y="1188720"/>
-            <a:ext cx="592920" cy="592920"/>
+            <a:ext cx="592560" cy="592560"/>
           </a:xfrm>
           <a:prstGeom prst="ellipse">
             <a:avLst/>
@@ -5921,7 +5912,7 @@
         <p:spPr>
           <a:xfrm>
             <a:off x="4937760" y="1188720"/>
-            <a:ext cx="592920" cy="592920"/>
+            <a:ext cx="592560" cy="592560"/>
           </a:xfrm>
           <a:prstGeom prst="rect">
             <a:avLst/>
@@ -5978,7 +5969,7 @@
         <p:spPr>
           <a:xfrm>
             <a:off x="5650920" y="1097280"/>
-            <a:ext cx="3107520" cy="272880"/>
+            <a:ext cx="3107160" cy="272520"/>
           </a:xfrm>
           <a:prstGeom prst="rect">
             <a:avLst/>
@@ -6035,7 +6026,7 @@
         <p:spPr>
           <a:xfrm>
             <a:off x="5650920" y="1371600"/>
-            <a:ext cx="3107520" cy="364320"/>
+            <a:ext cx="3107160" cy="363960"/>
           </a:xfrm>
           <a:prstGeom prst="rect">
             <a:avLst/>
@@ -6092,7 +6083,7 @@
         <p:spPr>
           <a:xfrm>
             <a:off x="4937760" y="1965960"/>
-            <a:ext cx="3747600" cy="638640"/>
+            <a:ext cx="3747240" cy="638280"/>
           </a:xfrm>
           <a:prstGeom prst="rect">
             <a:avLst/>
@@ -6149,7 +6140,7 @@
         <p:spPr>
           <a:xfrm>
             <a:off x="274320" y="2926080"/>
-            <a:ext cx="4159080" cy="1735920"/>
+            <a:ext cx="4158720" cy="1735560"/>
           </a:xfrm>
           <a:prstGeom prst="rect">
             <a:avLst/>
@@ -6206,7 +6197,7 @@
         <p:spPr>
           <a:xfrm>
             <a:off x="274320" y="2926080"/>
-            <a:ext cx="4159080" cy="62640"/>
+            <a:ext cx="4158720" cy="62280"/>
           </a:xfrm>
           <a:prstGeom prst="rect">
             <a:avLst/>
@@ -6256,7 +6247,7 @@
         <p:spPr>
           <a:xfrm>
             <a:off x="457200" y="3154680"/>
-            <a:ext cx="592920" cy="592920"/>
+            <a:ext cx="592560" cy="592560"/>
           </a:xfrm>
           <a:prstGeom prst="ellipse">
             <a:avLst/>
@@ -6310,7 +6301,7 @@
         <p:spPr>
           <a:xfrm>
             <a:off x="457200" y="3154680"/>
-            <a:ext cx="592920" cy="592920"/>
+            <a:ext cx="592560" cy="592560"/>
           </a:xfrm>
           <a:prstGeom prst="rect">
             <a:avLst/>
@@ -6367,7 +6358,7 @@
         <p:spPr>
           <a:xfrm>
             <a:off x="1170360" y="3063240"/>
-            <a:ext cx="3107520" cy="272880"/>
+            <a:ext cx="3107160" cy="272520"/>
           </a:xfrm>
           <a:prstGeom prst="rect">
             <a:avLst/>
@@ -6424,7 +6415,7 @@
         <p:spPr>
           <a:xfrm>
             <a:off x="1170360" y="3337560"/>
-            <a:ext cx="3107520" cy="364320"/>
+            <a:ext cx="3107160" cy="363960"/>
           </a:xfrm>
           <a:prstGeom prst="rect">
             <a:avLst/>
@@ -6481,7 +6472,7 @@
         <p:spPr>
           <a:xfrm>
             <a:off x="457200" y="3931920"/>
-            <a:ext cx="3747600" cy="638640"/>
+            <a:ext cx="3747240" cy="638280"/>
           </a:xfrm>
           <a:prstGeom prst="rect">
             <a:avLst/>
@@ -6538,7 +6529,7 @@
         <p:spPr>
           <a:xfrm>
             <a:off x="4754880" y="2926080"/>
-            <a:ext cx="4159080" cy="1735920"/>
+            <a:ext cx="4158720" cy="1735560"/>
           </a:xfrm>
           <a:prstGeom prst="rect">
             <a:avLst/>
@@ -6595,7 +6586,7 @@
         <p:spPr>
           <a:xfrm>
             <a:off x="4754880" y="2926080"/>
-            <a:ext cx="4159080" cy="62640"/>
+            <a:ext cx="4158720" cy="62280"/>
           </a:xfrm>
           <a:prstGeom prst="rect">
             <a:avLst/>
@@ -6645,7 +6636,7 @@
         <p:spPr>
           <a:xfrm>
             <a:off x="4937760" y="3154680"/>
-            <a:ext cx="592920" cy="592920"/>
+            <a:ext cx="592560" cy="592560"/>
           </a:xfrm>
           <a:prstGeom prst="ellipse">
             <a:avLst/>
@@ -6699,7 +6690,7 @@
         <p:spPr>
           <a:xfrm>
             <a:off x="4937760" y="3154680"/>
-            <a:ext cx="592920" cy="592920"/>
+            <a:ext cx="592560" cy="592560"/>
           </a:xfrm>
           <a:prstGeom prst="rect">
             <a:avLst/>
@@ -6756,7 +6747,7 @@
         <p:spPr>
           <a:xfrm>
             <a:off x="5650920" y="3063240"/>
-            <a:ext cx="3107520" cy="272880"/>
+            <a:ext cx="3107160" cy="272520"/>
           </a:xfrm>
           <a:prstGeom prst="rect">
             <a:avLst/>
@@ -6813,7 +6804,7 @@
         <p:spPr>
           <a:xfrm>
             <a:off x="5650920" y="3337560"/>
-            <a:ext cx="3107520" cy="364320"/>
+            <a:ext cx="3107160" cy="363960"/>
           </a:xfrm>
           <a:prstGeom prst="rect">
             <a:avLst/>
@@ -6870,7 +6861,7 @@
         <p:spPr>
           <a:xfrm>
             <a:off x="4937760" y="3931920"/>
-            <a:ext cx="3747600" cy="638640"/>
+            <a:ext cx="3747240" cy="638280"/>
           </a:xfrm>
           <a:prstGeom prst="rect">
             <a:avLst/>
@@ -6952,7 +6943,7 @@
         <p:spPr>
           <a:xfrm>
             <a:off x="0" y="0"/>
-            <a:ext cx="9142560" cy="775800"/>
+            <a:ext cx="9142200" cy="775440"/>
           </a:xfrm>
           <a:prstGeom prst="rect">
             <a:avLst/>
@@ -7002,7 +6993,7 @@
         <p:spPr>
           <a:xfrm>
             <a:off x="365760" y="0"/>
-            <a:ext cx="8228160" cy="775800"/>
+            <a:ext cx="8227800" cy="775440"/>
           </a:xfrm>
           <a:prstGeom prst="rect">
             <a:avLst/>
@@ -7059,7 +7050,7 @@
         <p:spPr>
           <a:xfrm>
             <a:off x="320040" y="960120"/>
-            <a:ext cx="8502480" cy="684360"/>
+            <a:ext cx="8502120" cy="684000"/>
           </a:xfrm>
           <a:prstGeom prst="rect">
             <a:avLst/>
@@ -7113,7 +7104,7 @@
         <p:spPr>
           <a:xfrm>
             <a:off x="320040" y="960120"/>
-            <a:ext cx="53280" cy="684360"/>
+            <a:ext cx="52920" cy="684000"/>
           </a:xfrm>
           <a:prstGeom prst="rect">
             <a:avLst/>
@@ -7163,7 +7154,7 @@
         <p:spPr>
           <a:xfrm>
             <a:off x="502920" y="960120"/>
-            <a:ext cx="2010240" cy="684360"/>
+            <a:ext cx="2009880" cy="684000"/>
           </a:xfrm>
           <a:prstGeom prst="rect">
             <a:avLst/>
@@ -7220,7 +7211,7 @@
         <p:spPr>
           <a:xfrm>
             <a:off x="2560320" y="960120"/>
-            <a:ext cx="6125040" cy="684360"/>
+            <a:ext cx="6124680" cy="684000"/>
           </a:xfrm>
           <a:prstGeom prst="rect">
             <a:avLst/>
@@ -7277,7 +7268,7 @@
         <p:spPr>
           <a:xfrm>
             <a:off x="320040" y="1783080"/>
-            <a:ext cx="8502480" cy="684360"/>
+            <a:ext cx="8502120" cy="684000"/>
           </a:xfrm>
           <a:prstGeom prst="rect">
             <a:avLst/>
@@ -7331,7 +7322,7 @@
         <p:spPr>
           <a:xfrm>
             <a:off x="320040" y="1783080"/>
-            <a:ext cx="53280" cy="684360"/>
+            <a:ext cx="52920" cy="684000"/>
           </a:xfrm>
           <a:prstGeom prst="rect">
             <a:avLst/>
@@ -7381,7 +7372,7 @@
         <p:spPr>
           <a:xfrm>
             <a:off x="502920" y="1783080"/>
-            <a:ext cx="2010240" cy="684360"/>
+            <a:ext cx="2009880" cy="684000"/>
           </a:xfrm>
           <a:prstGeom prst="rect">
             <a:avLst/>
@@ -7438,7 +7429,7 @@
         <p:spPr>
           <a:xfrm>
             <a:off x="2560320" y="1783080"/>
-            <a:ext cx="6125040" cy="684360"/>
+            <a:ext cx="6124680" cy="684000"/>
           </a:xfrm>
           <a:prstGeom prst="rect">
             <a:avLst/>
@@ -7495,7 +7486,7 @@
         <p:spPr>
           <a:xfrm>
             <a:off x="320040" y="2606040"/>
-            <a:ext cx="8502480" cy="684360"/>
+            <a:ext cx="8502120" cy="684000"/>
           </a:xfrm>
           <a:prstGeom prst="rect">
             <a:avLst/>
@@ -7549,7 +7540,7 @@
         <p:spPr>
           <a:xfrm>
             <a:off x="320040" y="2606040"/>
-            <a:ext cx="53280" cy="684360"/>
+            <a:ext cx="52920" cy="684000"/>
           </a:xfrm>
           <a:prstGeom prst="rect">
             <a:avLst/>
@@ -7599,7 +7590,7 @@
         <p:spPr>
           <a:xfrm>
             <a:off x="502920" y="2606040"/>
-            <a:ext cx="2010240" cy="684360"/>
+            <a:ext cx="2009880" cy="684000"/>
           </a:xfrm>
           <a:prstGeom prst="rect">
             <a:avLst/>
@@ -7656,7 +7647,7 @@
         <p:spPr>
           <a:xfrm>
             <a:off x="2560320" y="2606040"/>
-            <a:ext cx="6125040" cy="684360"/>
+            <a:ext cx="6124680" cy="684000"/>
           </a:xfrm>
           <a:prstGeom prst="rect">
             <a:avLst/>
@@ -7713,7 +7704,7 @@
         <p:spPr>
           <a:xfrm>
             <a:off x="320040" y="3429000"/>
-            <a:ext cx="8502480" cy="684360"/>
+            <a:ext cx="8502120" cy="684000"/>
           </a:xfrm>
           <a:prstGeom prst="rect">
             <a:avLst/>
@@ -7767,7 +7758,7 @@
         <p:spPr>
           <a:xfrm>
             <a:off x="320040" y="3429000"/>
-            <a:ext cx="53280" cy="684360"/>
+            <a:ext cx="52920" cy="684000"/>
           </a:xfrm>
           <a:prstGeom prst="rect">
             <a:avLst/>
@@ -7817,7 +7808,7 @@
         <p:spPr>
           <a:xfrm>
             <a:off x="502920" y="3429000"/>
-            <a:ext cx="2010240" cy="684360"/>
+            <a:ext cx="2009880" cy="684000"/>
           </a:xfrm>
           <a:prstGeom prst="rect">
             <a:avLst/>
@@ -7874,7 +7865,7 @@
         <p:spPr>
           <a:xfrm>
             <a:off x="2560320" y="3429000"/>
-            <a:ext cx="6125040" cy="684360"/>
+            <a:ext cx="6124680" cy="684000"/>
           </a:xfrm>
           <a:prstGeom prst="rect">
             <a:avLst/>
@@ -7931,7 +7922,7 @@
         <p:spPr>
           <a:xfrm>
             <a:off x="777240" y="4343400"/>
-            <a:ext cx="2467440" cy="638640"/>
+            <a:ext cx="2467080" cy="638280"/>
           </a:xfrm>
           <a:prstGeom prst="rect">
             <a:avLst/>
@@ -7976,7 +7967,7 @@
         <p:spPr>
           <a:xfrm>
             <a:off x="3611880" y="4343400"/>
-            <a:ext cx="2467440" cy="638640"/>
+            <a:ext cx="2467080" cy="638280"/>
           </a:xfrm>
           <a:prstGeom prst="rect">
             <a:avLst/>
@@ -8021,7 +8012,7 @@
         <p:spPr>
           <a:xfrm>
             <a:off x="6446520" y="4343400"/>
-            <a:ext cx="2467440" cy="638640"/>
+            <a:ext cx="2467080" cy="638280"/>
           </a:xfrm>
           <a:prstGeom prst="rect">
             <a:avLst/>
@@ -8103,7 +8094,7 @@
         <p:spPr>
           <a:xfrm>
             <a:off x="0" y="0"/>
-            <a:ext cx="9142560" cy="775800"/>
+            <a:ext cx="9142200" cy="775440"/>
           </a:xfrm>
           <a:prstGeom prst="rect">
             <a:avLst/>
@@ -8129,6 +8120,11 @@
             <a:noAutofit/>
           </a:bodyPr>
           <a:p>
+            <a:pPr>
+              <a:lnSpc>
+                <a:spcPct val="100000"/>
+              </a:lnSpc>
+            </a:pPr>
             <a:endParaRPr b="0" lang="en-US" sz="1800" spc="-1" strike="noStrike">
               <a:solidFill>
                 <a:srgbClr val="ffffff"/>
@@ -8148,7 +8144,7 @@
         <p:spPr>
           <a:xfrm>
             <a:off x="365760" y="0"/>
-            <a:ext cx="8228160" cy="775800"/>
+            <a:ext cx="8227800" cy="775440"/>
           </a:xfrm>
           <a:prstGeom prst="rect">
             <a:avLst/>
@@ -8205,7 +8201,7 @@
         <p:spPr>
           <a:xfrm>
             <a:off x="777240" y="4343400"/>
-            <a:ext cx="2467440" cy="638640"/>
+            <a:ext cx="2467080" cy="638280"/>
           </a:xfrm>
           <a:prstGeom prst="rect">
             <a:avLst/>
@@ -8226,6 +8222,11 @@
             <a:noAutofit/>
           </a:bodyPr>
           <a:p>
+            <a:pPr>
+              <a:lnSpc>
+                <a:spcPct val="100000"/>
+              </a:lnSpc>
+            </a:pPr>
             <a:endParaRPr b="0" lang="en-US" sz="1800" spc="-1" strike="noStrike">
               <a:solidFill>
                 <a:srgbClr val="000000"/>
@@ -8245,7 +8246,7 @@
         <p:spPr>
           <a:xfrm>
             <a:off x="3611880" y="4343400"/>
-            <a:ext cx="2467440" cy="638640"/>
+            <a:ext cx="2467080" cy="638280"/>
           </a:xfrm>
           <a:prstGeom prst="rect">
             <a:avLst/>
@@ -8266,6 +8267,11 @@
             <a:noAutofit/>
           </a:bodyPr>
           <a:p>
+            <a:pPr>
+              <a:lnSpc>
+                <a:spcPct val="100000"/>
+              </a:lnSpc>
+            </a:pPr>
             <a:endParaRPr b="0" lang="en-US" sz="1800" spc="-1" strike="noStrike">
               <a:solidFill>
                 <a:srgbClr val="000000"/>
@@ -8285,7 +8291,7 @@
         <p:spPr>
           <a:xfrm>
             <a:off x="6446520" y="4343400"/>
-            <a:ext cx="2467440" cy="638640"/>
+            <a:ext cx="2467080" cy="638280"/>
           </a:xfrm>
           <a:prstGeom prst="rect">
             <a:avLst/>
@@ -8306,6 +8312,11 @@
             <a:noAutofit/>
           </a:bodyPr>
           <a:p>
+            <a:pPr>
+              <a:lnSpc>
+                <a:spcPct val="100000"/>
+              </a:lnSpc>
+            </a:pPr>
             <a:endParaRPr b="0" lang="en-US" sz="1800" spc="-1" strike="noStrike">
               <a:solidFill>
                 <a:srgbClr val="000000"/>
@@ -8329,7 +8340,7 @@
         <p:spPr>
           <a:xfrm>
             <a:off x="732240" y="1600200"/>
-            <a:ext cx="7717320" cy="2474280"/>
+            <a:ext cx="7716960" cy="2473920"/>
           </a:xfrm>
           <a:prstGeom prst="rect">
             <a:avLst/>
@@ -8385,7 +8396,7 @@
         <p:spPr>
           <a:xfrm>
             <a:off x="0" y="0"/>
-            <a:ext cx="9142560" cy="775800"/>
+            <a:ext cx="9142200" cy="775440"/>
           </a:xfrm>
           <a:prstGeom prst="rect">
             <a:avLst/>
@@ -8435,7 +8446,7 @@
         <p:spPr>
           <a:xfrm>
             <a:off x="365760" y="0"/>
-            <a:ext cx="8228160" cy="775800"/>
+            <a:ext cx="8227800" cy="775440"/>
           </a:xfrm>
           <a:prstGeom prst="rect">
             <a:avLst/>
@@ -8492,7 +8503,7 @@
         <p:spPr>
           <a:xfrm>
             <a:off x="777240" y="4343400"/>
-            <a:ext cx="2467440" cy="638640"/>
+            <a:ext cx="2467080" cy="638280"/>
           </a:xfrm>
           <a:prstGeom prst="rect">
             <a:avLst/>
@@ -8537,7 +8548,7 @@
         <p:spPr>
           <a:xfrm>
             <a:off x="3611880" y="4343400"/>
-            <a:ext cx="2467440" cy="638640"/>
+            <a:ext cx="2467080" cy="638280"/>
           </a:xfrm>
           <a:prstGeom prst="rect">
             <a:avLst/>
@@ -8582,7 +8593,7 @@
         <p:spPr>
           <a:xfrm>
             <a:off x="6446520" y="4343400"/>
-            <a:ext cx="2467440" cy="638640"/>
+            <a:ext cx="2467080" cy="638280"/>
           </a:xfrm>
           <a:prstGeom prst="rect">
             <a:avLst/>
@@ -8627,7 +8638,7 @@
         <p:spPr>
           <a:xfrm>
             <a:off x="228600" y="914400"/>
-            <a:ext cx="8457120" cy="1827720"/>
+            <a:ext cx="8456760" cy="1827360"/>
           </a:xfrm>
           <a:prstGeom prst="rect">
             <a:avLst/>
@@ -8754,7 +8765,7 @@
         <p:spPr>
           <a:xfrm>
             <a:off x="228600" y="2971800"/>
-            <a:ext cx="8457120" cy="1370520"/>
+            <a:ext cx="8456760" cy="1370160"/>
           </a:xfrm>
           <a:prstGeom prst="rect">
             <a:avLst/>
@@ -8885,7 +8896,7 @@
         <p:spPr>
           <a:xfrm>
             <a:off x="0" y="0"/>
-            <a:ext cx="9142560" cy="775800"/>
+            <a:ext cx="9142200" cy="775440"/>
           </a:xfrm>
           <a:prstGeom prst="rect">
             <a:avLst/>
@@ -8935,7 +8946,7 @@
         <p:spPr>
           <a:xfrm>
             <a:off x="365760" y="0"/>
-            <a:ext cx="8228160" cy="775800"/>
+            <a:ext cx="8227800" cy="775440"/>
           </a:xfrm>
           <a:prstGeom prst="rect">
             <a:avLst/>
@@ -8992,7 +9003,7 @@
         <p:spPr>
           <a:xfrm>
             <a:off x="777240" y="4343400"/>
-            <a:ext cx="2467440" cy="638640"/>
+            <a:ext cx="2467080" cy="638280"/>
           </a:xfrm>
           <a:prstGeom prst="rect">
             <a:avLst/>
@@ -9037,7 +9048,7 @@
         <p:spPr>
           <a:xfrm>
             <a:off x="3611880" y="4343400"/>
-            <a:ext cx="2467440" cy="638640"/>
+            <a:ext cx="2467080" cy="638280"/>
           </a:xfrm>
           <a:prstGeom prst="rect">
             <a:avLst/>
@@ -9082,7 +9093,7 @@
         <p:spPr>
           <a:xfrm>
             <a:off x="6446520" y="4343400"/>
-            <a:ext cx="2467440" cy="638640"/>
+            <a:ext cx="2467080" cy="638280"/>
           </a:xfrm>
           <a:prstGeom prst="rect">
             <a:avLst/>
@@ -9127,7 +9138,7 @@
         <p:spPr>
           <a:xfrm>
             <a:off x="228600" y="914400"/>
-            <a:ext cx="8457120" cy="1827720"/>
+            <a:ext cx="8456760" cy="1827360"/>
           </a:xfrm>
           <a:prstGeom prst="rect">
             <a:avLst/>
@@ -9254,7 +9265,7 @@
         <p:spPr>
           <a:xfrm>
             <a:off x="228600" y="2971800"/>
-            <a:ext cx="8457120" cy="1827720"/>
+            <a:ext cx="8456760" cy="1827360"/>
           </a:xfrm>
           <a:prstGeom prst="rect">
             <a:avLst/>
@@ -9431,7 +9442,7 @@
         <p:spPr>
           <a:xfrm>
             <a:off x="-914400" y="-914400"/>
-            <a:ext cx="5484960" cy="5484960"/>
+            <a:ext cx="5484600" cy="5484600"/>
           </a:xfrm>
           <a:prstGeom prst="ellipse">
             <a:avLst/>
@@ -9485,7 +9496,7 @@
         <p:spPr>
           <a:xfrm>
             <a:off x="5486400" y="1828800"/>
-            <a:ext cx="4570560" cy="4570560"/>
+            <a:ext cx="4570200" cy="4570200"/>
           </a:xfrm>
           <a:prstGeom prst="ellipse">
             <a:avLst/>
@@ -9539,7 +9550,7 @@
         <p:spPr>
           <a:xfrm>
             <a:off x="0" y="0"/>
-            <a:ext cx="163080" cy="5142240"/>
+            <a:ext cx="162720" cy="5141880"/>
           </a:xfrm>
           <a:prstGeom prst="rect">
             <a:avLst/>
@@ -9589,7 +9600,7 @@
         <p:spPr>
           <a:xfrm>
             <a:off x="457200" y="822960"/>
-            <a:ext cx="4570560" cy="345960"/>
+            <a:ext cx="4570200" cy="345600"/>
           </a:xfrm>
           <a:prstGeom prst="rect">
             <a:avLst/>
@@ -9646,7 +9657,7 @@
         <p:spPr>
           <a:xfrm>
             <a:off x="457200" y="1188720"/>
-            <a:ext cx="5942160" cy="1644480"/>
+            <a:ext cx="5941800" cy="1644120"/>
           </a:xfrm>
           <a:prstGeom prst="rect">
             <a:avLst/>
@@ -9755,7 +9766,7 @@
         <p:spPr>
           <a:xfrm>
             <a:off x="457200" y="2926080"/>
-            <a:ext cx="6399360" cy="345960"/>
+            <a:ext cx="6399000" cy="345600"/>
           </a:xfrm>
           <a:prstGeom prst="rect">
             <a:avLst/>
@@ -9822,7 +9833,7 @@
         <p:spPr>
           <a:xfrm>
             <a:off x="457200" y="3291840"/>
-            <a:ext cx="6399360" cy="345960"/>
+            <a:ext cx="6399000" cy="345600"/>
           </a:xfrm>
           <a:prstGeom prst="rect">
             <a:avLst/>
@@ -9889,7 +9900,7 @@
         <p:spPr>
           <a:xfrm>
             <a:off x="457200" y="3657600"/>
-            <a:ext cx="6399360" cy="345960"/>
+            <a:ext cx="6399000" cy="345600"/>
           </a:xfrm>
           <a:prstGeom prst="rect">
             <a:avLst/>
@@ -9956,7 +9967,7 @@
         <p:spPr>
           <a:xfrm>
             <a:off x="457200" y="4160520"/>
-            <a:ext cx="2924640" cy="620280"/>
+            <a:ext cx="2924280" cy="619920"/>
           </a:xfrm>
           <a:prstGeom prst="rect">
             <a:avLst/>
@@ -10006,7 +10017,7 @@
         <p:spPr>
           <a:xfrm>
             <a:off x="457200" y="4160520"/>
-            <a:ext cx="2924640" cy="620280"/>
+            <a:ext cx="2924280" cy="619920"/>
           </a:xfrm>
           <a:prstGeom prst="rect">
             <a:avLst/>
